--- a/data validation.pptx
+++ b/data validation.pptx
@@ -104,6 +104,11 @@
       </a:defRPr>
     </a:lvl9pPr>
   </p:defaultTextStyle>
+  <p:extLst>
+    <p:ext uri="{EFAFB233-063F-42B5-8137-9DF3F51BA10A}">
+      <p15:sldGuideLst xmlns:p15="http://schemas.microsoft.com/office/powerpoint/2012/main"/>
+    </p:ext>
+  </p:extLst>
 </p:presentation>
 </file>
 
@@ -254,7 +259,7 @@
           <a:p>
             <a:fld id="{B0E6BAF9-4AD6-43E5-80C6-FEAFE9820E11}" type="datetimeFigureOut">
               <a:rPr lang="en-US" smtClean="0"/>
-              <a:t>5/23/2026</a:t>
+              <a:t>8/6/2026</a:t>
             </a:fld>
             <a:endParaRPr lang="en-US"/>
           </a:p>
@@ -452,7 +457,7 @@
           <a:p>
             <a:fld id="{B0E6BAF9-4AD6-43E5-80C6-FEAFE9820E11}" type="datetimeFigureOut">
               <a:rPr lang="en-US" smtClean="0"/>
-              <a:t>5/23/2026</a:t>
+              <a:t>8/6/2026</a:t>
             </a:fld>
             <a:endParaRPr lang="en-US"/>
           </a:p>
@@ -660,7 +665,7 @@
           <a:p>
             <a:fld id="{B0E6BAF9-4AD6-43E5-80C6-FEAFE9820E11}" type="datetimeFigureOut">
               <a:rPr lang="en-US" smtClean="0"/>
-              <a:t>5/23/2026</a:t>
+              <a:t>8/6/2026</a:t>
             </a:fld>
             <a:endParaRPr lang="en-US"/>
           </a:p>
@@ -858,7 +863,7 @@
           <a:p>
             <a:fld id="{B0E6BAF9-4AD6-43E5-80C6-FEAFE9820E11}" type="datetimeFigureOut">
               <a:rPr lang="en-US" smtClean="0"/>
-              <a:t>5/23/2026</a:t>
+              <a:t>8/6/2026</a:t>
             </a:fld>
             <a:endParaRPr lang="en-US"/>
           </a:p>
@@ -1133,7 +1138,7 @@
           <a:p>
             <a:fld id="{B0E6BAF9-4AD6-43E5-80C6-FEAFE9820E11}" type="datetimeFigureOut">
               <a:rPr lang="en-US" smtClean="0"/>
-              <a:t>5/23/2026</a:t>
+              <a:t>8/6/2026</a:t>
             </a:fld>
             <a:endParaRPr lang="en-US"/>
           </a:p>
@@ -1398,7 +1403,7 @@
           <a:p>
             <a:fld id="{B0E6BAF9-4AD6-43E5-80C6-FEAFE9820E11}" type="datetimeFigureOut">
               <a:rPr lang="en-US" smtClean="0"/>
-              <a:t>5/23/2026</a:t>
+              <a:t>8/6/2026</a:t>
             </a:fld>
             <a:endParaRPr lang="en-US"/>
           </a:p>
@@ -1810,7 +1815,7 @@
           <a:p>
             <a:fld id="{B0E6BAF9-4AD6-43E5-80C6-FEAFE9820E11}" type="datetimeFigureOut">
               <a:rPr lang="en-US" smtClean="0"/>
-              <a:t>5/23/2026</a:t>
+              <a:t>8/6/2026</a:t>
             </a:fld>
             <a:endParaRPr lang="en-US"/>
           </a:p>
@@ -1951,7 +1956,7 @@
           <a:p>
             <a:fld id="{B0E6BAF9-4AD6-43E5-80C6-FEAFE9820E11}" type="datetimeFigureOut">
               <a:rPr lang="en-US" smtClean="0"/>
-              <a:t>5/23/2026</a:t>
+              <a:t>8/6/2026</a:t>
             </a:fld>
             <a:endParaRPr lang="en-US"/>
           </a:p>
@@ -2064,7 +2069,7 @@
           <a:p>
             <a:fld id="{B0E6BAF9-4AD6-43E5-80C6-FEAFE9820E11}" type="datetimeFigureOut">
               <a:rPr lang="en-US" smtClean="0"/>
-              <a:t>5/23/2026</a:t>
+              <a:t>8/6/2026</a:t>
             </a:fld>
             <a:endParaRPr lang="en-US"/>
           </a:p>
@@ -2375,7 +2380,7 @@
           <a:p>
             <a:fld id="{B0E6BAF9-4AD6-43E5-80C6-FEAFE9820E11}" type="datetimeFigureOut">
               <a:rPr lang="en-US" smtClean="0"/>
-              <a:t>5/23/2026</a:t>
+              <a:t>8/6/2026</a:t>
             </a:fld>
             <a:endParaRPr lang="en-US"/>
           </a:p>
@@ -2663,7 +2668,7 @@
           <a:p>
             <a:fld id="{B0E6BAF9-4AD6-43E5-80C6-FEAFE9820E11}" type="datetimeFigureOut">
               <a:rPr lang="en-US" smtClean="0"/>
-              <a:t>5/23/2026</a:t>
+              <a:t>8/6/2026</a:t>
             </a:fld>
             <a:endParaRPr lang="en-US"/>
           </a:p>
@@ -2904,7 +2909,7 @@
           <a:p>
             <a:fld id="{B0E6BAF9-4AD6-43E5-80C6-FEAFE9820E11}" type="datetimeFigureOut">
               <a:rPr lang="en-US" smtClean="0"/>
-              <a:t>5/23/2026</a:t>
+              <a:t>8/6/2026</a:t>
             </a:fld>
             <a:endParaRPr lang="en-US"/>
           </a:p>
@@ -3380,37 +3385,6 @@
           </a:p>
         </p:txBody>
       </p:sp>
-      <p:pic>
-        <p:nvPicPr>
-          <p:cNvPr id="10" name="Picture 9">
-            <a:extLst>
-              <a:ext uri="{FF2B5EF4-FFF2-40B4-BE49-F238E27FC236}">
-                <a16:creationId xmlns:a16="http://schemas.microsoft.com/office/drawing/2014/main" id="{C59A495B-CEE7-4BA6-6939-A9552B463581}"/>
-              </a:ext>
-            </a:extLst>
-          </p:cNvPr>
-          <p:cNvPicPr>
-            <a:picLocks noChangeAspect="1"/>
-          </p:cNvPicPr>
-          <p:nvPr/>
-        </p:nvPicPr>
-        <p:blipFill>
-          <a:blip r:embed="rId2"/>
-          <a:srcRect l="1375" r="-1375" b="16150"/>
-          <a:stretch>
-            <a:fillRect/>
-          </a:stretch>
-        </p:blipFill>
-        <p:spPr>
-          <a:xfrm>
-            <a:off x="6619439" y="457877"/>
-            <a:ext cx="4289648" cy="5527633"/>
-          </a:xfrm>
-          <a:prstGeom prst="rect">
-            <a:avLst/>
-          </a:prstGeom>
-        </p:spPr>
-      </p:pic>
       <p:grpSp>
         <p:nvGrpSpPr>
           <p:cNvPr id="11" name="Group 10">
@@ -3518,7 +3492,7 @@
               <p:nvPr/>
             </p:nvPicPr>
             <p:blipFill>
-              <a:blip r:embed="rId3"/>
+              <a:blip r:embed="rId2"/>
               <a:srcRect t="10030" r="15406"/>
               <a:stretch>
                 <a:fillRect/>
@@ -3645,7 +3619,7 @@
             <p:nvPr/>
           </p:nvPicPr>
           <p:blipFill>
-            <a:blip r:embed="rId2"/>
+            <a:blip r:embed="rId3"/>
             <a:srcRect t="85247"/>
             <a:stretch>
               <a:fillRect/>
@@ -4011,6 +3985,43 @@
           </a:p>
         </p:txBody>
       </p:sp>
+      <p:pic>
+        <p:nvPicPr>
+          <p:cNvPr id="5" name="Picture 4">
+            <a:extLst>
+              <a:ext uri="{FF2B5EF4-FFF2-40B4-BE49-F238E27FC236}">
+                <a16:creationId xmlns:a16="http://schemas.microsoft.com/office/drawing/2014/main" id="{A09B8D07-7F98-2CFA-330A-F14CFE2A1D0F}"/>
+              </a:ext>
+            </a:extLst>
+          </p:cNvPr>
+          <p:cNvPicPr>
+            <a:picLocks noChangeAspect="1"/>
+          </p:cNvPicPr>
+          <p:nvPr/>
+        </p:nvPicPr>
+        <p:blipFill>
+          <a:blip r:embed="rId4">
+            <a:extLst>
+              <a:ext uri="{28A0092B-C50C-407E-A947-70E740481C1C}">
+                <a14:useLocalDpi xmlns:a14="http://schemas.microsoft.com/office/drawing/2010/main" val="0"/>
+              </a:ext>
+            </a:extLst>
+          </a:blip>
+          <a:srcRect r="2307" b="2914"/>
+          <a:stretch>
+            <a:fillRect/>
+          </a:stretch>
+        </p:blipFill>
+        <p:spPr>
+          <a:xfrm>
+            <a:off x="6659606" y="1646186"/>
+            <a:ext cx="5532394" cy="3416850"/>
+          </a:xfrm>
+          <a:prstGeom prst="rect">
+            <a:avLst/>
+          </a:prstGeom>
+        </p:spPr>
+      </p:pic>
     </p:spTree>
     <p:extLst>
       <p:ext uri="{BB962C8B-B14F-4D97-AF65-F5344CB8AC3E}">
@@ -4021,89 +4032,6 @@
   <p:clrMapOvr>
     <a:masterClrMapping/>
   </p:clrMapOvr>
-  <p:timing>
-    <p:tnLst>
-      <p:par>
-        <p:cTn id="1" dur="indefinite" restart="never" nodeType="tmRoot">
-          <p:childTnLst>
-            <p:seq concurrent="1" nextAc="seek">
-              <p:cTn id="2" dur="indefinite" nodeType="mainSeq">
-                <p:childTnLst>
-                  <p:par>
-                    <p:cTn id="3" fill="hold">
-                      <p:stCondLst>
-                        <p:cond delay="indefinite"/>
-                      </p:stCondLst>
-                      <p:childTnLst>
-                        <p:par>
-                          <p:cTn id="4" fill="hold">
-                            <p:stCondLst>
-                              <p:cond delay="0"/>
-                            </p:stCondLst>
-                            <p:childTnLst>
-                              <p:par>
-                                <p:cTn id="5" presetID="10" presetClass="entr" presetSubtype="0" fill="hold" nodeType="clickEffect">
-                                  <p:stCondLst>
-                                    <p:cond delay="0"/>
-                                  </p:stCondLst>
-                                  <p:childTnLst>
-                                    <p:set>
-                                      <p:cBhvr>
-                                        <p:cTn id="6" dur="1" fill="hold">
-                                          <p:stCondLst>
-                                            <p:cond delay="0"/>
-                                          </p:stCondLst>
-                                        </p:cTn>
-                                        <p:tgtEl>
-                                          <p:spTgt spid="10"/>
-                                        </p:tgtEl>
-                                        <p:attrNameLst>
-                                          <p:attrName>style.visibility</p:attrName>
-                                        </p:attrNameLst>
-                                      </p:cBhvr>
-                                      <p:to>
-                                        <p:strVal val="visible"/>
-                                      </p:to>
-                                    </p:set>
-                                    <p:animEffect transition="in" filter="fade">
-                                      <p:cBhvr>
-                                        <p:cTn id="7" dur="500"/>
-                                        <p:tgtEl>
-                                          <p:spTgt spid="10"/>
-                                        </p:tgtEl>
-                                      </p:cBhvr>
-                                    </p:animEffect>
-                                  </p:childTnLst>
-                                </p:cTn>
-                              </p:par>
-                            </p:childTnLst>
-                          </p:cTn>
-                        </p:par>
-                      </p:childTnLst>
-                    </p:cTn>
-                  </p:par>
-                </p:childTnLst>
-              </p:cTn>
-              <p:prevCondLst>
-                <p:cond evt="onPrev" delay="0">
-                  <p:tgtEl>
-                    <p:sldTgt/>
-                  </p:tgtEl>
-                </p:cond>
-              </p:prevCondLst>
-              <p:nextCondLst>
-                <p:cond evt="onNext" delay="0">
-                  <p:tgtEl>
-                    <p:sldTgt/>
-                  </p:tgtEl>
-                </p:cond>
-              </p:nextCondLst>
-            </p:seq>
-          </p:childTnLst>
-        </p:cTn>
-      </p:par>
-    </p:tnLst>
-  </p:timing>
 </p:sld>
 </file>
 
